--- a/assets/pptx/catalog-50.pptx
+++ b/assets/pptx/catalog-50.pptx
@@ -3250,7 +3250,7 @@
                 <a:ea typeface="Ebrima"/>
                 <a:cs typeface="Ebrima"/>
               </a:rPr>
-              <a:t>- ከሰማነው ከአነበብነው ጌታ ኢየሱስ ልቆ አየነው (2x)</a:t>
+              <a:t>- ከሰማነው ከአነበብነው ጌታ ኢየሱስ ልቆ አየነው 2x</a:t>
             </a:r>
           </a:p>
           <a:p>
@@ -3268,7 +3268,7 @@
                 <a:ea typeface="Ebrima"/>
                 <a:cs typeface="Ebrima"/>
               </a:rPr>
-              <a:t>መሸማቀቅ የለም ዛሬ እናምልከው በዝማሬ (2x)</a:t>
+              <a:t>መሸማቀቅ የለም ዛሬ እናምልከው በዝማሬ 2x</a:t>
             </a:r>
           </a:p>
           <a:p>
@@ -3286,7 +3286,7 @@
                 <a:ea typeface="Ebrima"/>
                 <a:cs typeface="Ebrima"/>
               </a:rPr>
-              <a:t>ለጌታችን ለንጉሡ ይዘመር ለቅዱሱ (2x)</a:t>
+              <a:t>ለጌታችን ለንጉሡ ይዘመር ለቅዱሱ 2x</a:t>
             </a:r>
           </a:p>
         </p:txBody>
@@ -3371,7 +3371,7 @@
                 <a:ea typeface="Ebrima"/>
                 <a:cs typeface="Ebrima"/>
               </a:rPr>
-              <a:t>ለውዳችን ይዘመር ለአባታችን ይዘመር (2x)</a:t>
+              <a:t>ለውዳችን ይዘመር ለአባታችን ይዘመር 2x</a:t>
             </a:r>
           </a:p>
         </p:txBody>
@@ -3559,7 +3559,7 @@
                 <a:ea typeface="Ebrima"/>
                 <a:cs typeface="Ebrima"/>
               </a:rPr>
-              <a:t>- ከሰማነው ከአነበብነው ጌታ ኢየሱስ ልቆ አየነው (2x)</a:t>
+              <a:t>- ከሰማነው ከአነበብነው ጌታ ኢየሱስ ልቆ አየነው 2x</a:t>
             </a:r>
           </a:p>
           <a:p>
@@ -3577,7 +3577,7 @@
                 <a:ea typeface="Ebrima"/>
                 <a:cs typeface="Ebrima"/>
               </a:rPr>
-              <a:t>መሸማቀቅ የለም ዛሬ እናምልከው በዝማሬ (2x)</a:t>
+              <a:t>መሸማቀቅ የለም ዛሬ እናምልከው በዝማሬ 2x</a:t>
             </a:r>
           </a:p>
           <a:p>
@@ -3595,7 +3595,7 @@
                 <a:ea typeface="Ebrima"/>
                 <a:cs typeface="Ebrima"/>
               </a:rPr>
-              <a:t>ለጌታችን ለንጉሡ ይዘመር ለቅዱሱ (2x)</a:t>
+              <a:t>ለጌታችን ለንጉሡ ይዘመር ለቅዱሱ 2x</a:t>
             </a:r>
           </a:p>
         </p:txBody>
@@ -3680,7 +3680,7 @@
                 <a:ea typeface="Ebrima"/>
                 <a:cs typeface="Ebrima"/>
               </a:rPr>
-              <a:t>ለውዳችን ይዘመር ለአባታችን ይዘመር (2x)</a:t>
+              <a:t>ለውዳችን ይዘመር ለአባታችን ይዘመር 2x</a:t>
             </a:r>
           </a:p>
         </p:txBody>
@@ -3747,7 +3747,7 @@
                 <a:ea typeface="Ebrima"/>
                 <a:cs typeface="Ebrima"/>
               </a:rPr>
-              <a:t>(ኦሮምኛ)</a:t>
+              <a:t>ኦሮምኛ</a:t>
             </a:r>
           </a:p>
         </p:txBody>
@@ -3953,7 +3953,7 @@
                 <a:ea typeface="Ebrima"/>
                 <a:cs typeface="Ebrima"/>
               </a:rPr>
-              <a:t>- ከሰማነው ከአነበብነው ጌታ ኢየሱስ ልቆ አየነው (2x)</a:t>
+              <a:t>- ከሰማነው ከአነበብነው ጌታ ኢየሱስ ልቆ አየነው 2x</a:t>
             </a:r>
           </a:p>
           <a:p>
@@ -3971,7 +3971,7 @@
                 <a:ea typeface="Ebrima"/>
                 <a:cs typeface="Ebrima"/>
               </a:rPr>
-              <a:t>መሸማቀቅ የለም ዛሬ እናምልከው በዝማሬ (2x)</a:t>
+              <a:t>መሸማቀቅ የለም ዛሬ እናምልከው በዝማሬ 2x</a:t>
             </a:r>
           </a:p>
           <a:p>
@@ -3989,7 +3989,7 @@
                 <a:ea typeface="Ebrima"/>
                 <a:cs typeface="Ebrima"/>
               </a:rPr>
-              <a:t>ለጌታችን ለንጉሡ ይዘመር ለቅዱሱ (2x)</a:t>
+              <a:t>ለጌታችን ለንጉሡ ይዘመር ለቅዱሱ 2x</a:t>
             </a:r>
           </a:p>
         </p:txBody>
@@ -4074,7 +4074,7 @@
                 <a:ea typeface="Ebrima"/>
                 <a:cs typeface="Ebrima"/>
               </a:rPr>
-              <a:t>ለውዳችን ይዘመር ለአባታችን ይዘመር (2x)</a:t>
+              <a:t>ለውዳችን ይዘመር ለአባታችን ይዘመር 2x</a:t>
             </a:r>
           </a:p>
         </p:txBody>
@@ -4141,7 +4141,7 @@
                 <a:ea typeface="Ebrima"/>
                 <a:cs typeface="Ebrima"/>
               </a:rPr>
-              <a:t>(ኦሮምኛ)</a:t>
+              <a:t>ኦሮምኛ</a:t>
             </a:r>
           </a:p>
         </p:txBody>
